--- a/Project001_打者の動作撮影（山藤）/presen/人間作製/進捗報告.pptx
+++ b/Project001_打者の動作撮影（山藤）/presen/人間作製/進捗報告.pptx
@@ -8,14 +8,15 @@
     <p:sldId id="257" r:id="rId2"/>
     <p:sldId id="258" r:id="rId3"/>
     <p:sldId id="259" r:id="rId4"/>
-    <p:sldId id="263" r:id="rId5"/>
-    <p:sldId id="264" r:id="rId6"/>
-    <p:sldId id="260" r:id="rId7"/>
-    <p:sldId id="261" r:id="rId8"/>
-    <p:sldId id="262" r:id="rId9"/>
-    <p:sldId id="265" r:id="rId10"/>
-    <p:sldId id="266" r:id="rId11"/>
-    <p:sldId id="267" r:id="rId12"/>
+    <p:sldId id="268" r:id="rId5"/>
+    <p:sldId id="263" r:id="rId6"/>
+    <p:sldId id="264" r:id="rId7"/>
+    <p:sldId id="260" r:id="rId8"/>
+    <p:sldId id="261" r:id="rId9"/>
+    <p:sldId id="262" r:id="rId10"/>
+    <p:sldId id="265" r:id="rId11"/>
+    <p:sldId id="266" r:id="rId12"/>
+    <p:sldId id="267" r:id="rId13"/>
   </p:sldIdLst>
   <p:sldSz cx="12192000" cy="6858000"/>
   <p:notesSz cx="6858000" cy="9144000"/>
@@ -352,7 +353,7 @@
           <a:p>
             <a:fld id="{A30DED64-1E1A-3640-B2F9-E500B79F14E6}" type="datetimeFigureOut">
               <a:rPr kumimoji="1" lang="ja-JP" altLang="en-US" smtClean="0"/>
-              <a:t>2026/7/6</a:t>
+              <a:t>2026/7/8</a:t>
             </a:fld>
             <a:endParaRPr kumimoji="1" lang="ja-JP" altLang="en-US"/>
           </a:p>
@@ -582,7 +583,7 @@
           <a:p>
             <a:fld id="{A30DED64-1E1A-3640-B2F9-E500B79F14E6}" type="datetimeFigureOut">
               <a:rPr kumimoji="1" lang="ja-JP" altLang="en-US" smtClean="0"/>
-              <a:t>2026/7/6</a:t>
+              <a:t>2026/7/8</a:t>
             </a:fld>
             <a:endParaRPr kumimoji="1" lang="ja-JP" altLang="en-US"/>
           </a:p>
@@ -822,7 +823,7 @@
           <a:p>
             <a:fld id="{A30DED64-1E1A-3640-B2F9-E500B79F14E6}" type="datetimeFigureOut">
               <a:rPr kumimoji="1" lang="ja-JP" altLang="en-US" smtClean="0"/>
-              <a:t>2026/7/6</a:t>
+              <a:t>2026/7/8</a:t>
             </a:fld>
             <a:endParaRPr kumimoji="1" lang="ja-JP" altLang="en-US"/>
           </a:p>
@@ -1052,7 +1053,7 @@
           <a:p>
             <a:fld id="{A30DED64-1E1A-3640-B2F9-E500B79F14E6}" type="datetimeFigureOut">
               <a:rPr kumimoji="1" lang="ja-JP" altLang="en-US" smtClean="0"/>
-              <a:t>2026/7/6</a:t>
+              <a:t>2026/7/8</a:t>
             </a:fld>
             <a:endParaRPr kumimoji="1" lang="ja-JP" altLang="en-US"/>
           </a:p>
@@ -1327,7 +1328,7 @@
           <a:p>
             <a:fld id="{A30DED64-1E1A-3640-B2F9-E500B79F14E6}" type="datetimeFigureOut">
               <a:rPr kumimoji="1" lang="ja-JP" altLang="en-US" smtClean="0"/>
-              <a:t>2026/7/6</a:t>
+              <a:t>2026/7/8</a:t>
             </a:fld>
             <a:endParaRPr kumimoji="1" lang="ja-JP" altLang="en-US"/>
           </a:p>
@@ -1656,7 +1657,7 @@
           <a:p>
             <a:fld id="{A30DED64-1E1A-3640-B2F9-E500B79F14E6}" type="datetimeFigureOut">
               <a:rPr kumimoji="1" lang="ja-JP" altLang="en-US" smtClean="0"/>
-              <a:t>2026/7/6</a:t>
+              <a:t>2026/7/8</a:t>
             </a:fld>
             <a:endParaRPr kumimoji="1" lang="ja-JP" altLang="en-US"/>
           </a:p>
@@ -2132,7 +2133,7 @@
           <a:p>
             <a:fld id="{A30DED64-1E1A-3640-B2F9-E500B79F14E6}" type="datetimeFigureOut">
               <a:rPr kumimoji="1" lang="ja-JP" altLang="en-US" smtClean="0"/>
-              <a:t>2026/7/6</a:t>
+              <a:t>2026/7/8</a:t>
             </a:fld>
             <a:endParaRPr kumimoji="1" lang="ja-JP" altLang="en-US"/>
           </a:p>
@@ -2273,7 +2274,7 @@
           <a:p>
             <a:fld id="{A30DED64-1E1A-3640-B2F9-E500B79F14E6}" type="datetimeFigureOut">
               <a:rPr kumimoji="1" lang="ja-JP" altLang="en-US" smtClean="0"/>
-              <a:t>2026/7/6</a:t>
+              <a:t>2026/7/8</a:t>
             </a:fld>
             <a:endParaRPr kumimoji="1" lang="ja-JP" altLang="en-US"/>
           </a:p>
@@ -2386,7 +2387,7 @@
           <a:p>
             <a:fld id="{A30DED64-1E1A-3640-B2F9-E500B79F14E6}" type="datetimeFigureOut">
               <a:rPr kumimoji="1" lang="ja-JP" altLang="en-US" smtClean="0"/>
-              <a:t>2026/7/6</a:t>
+              <a:t>2026/7/8</a:t>
             </a:fld>
             <a:endParaRPr kumimoji="1" lang="ja-JP" altLang="en-US"/>
           </a:p>
@@ -2729,7 +2730,7 @@
           <a:p>
             <a:fld id="{A30DED64-1E1A-3640-B2F9-E500B79F14E6}" type="datetimeFigureOut">
               <a:rPr kumimoji="1" lang="ja-JP" altLang="en-US" smtClean="0"/>
-              <a:t>2026/7/6</a:t>
+              <a:t>2026/7/8</a:t>
             </a:fld>
             <a:endParaRPr kumimoji="1" lang="ja-JP" altLang="en-US"/>
           </a:p>
@@ -3017,7 +3018,7 @@
           <a:p>
             <a:fld id="{A30DED64-1E1A-3640-B2F9-E500B79F14E6}" type="datetimeFigureOut">
               <a:rPr kumimoji="1" lang="ja-JP" altLang="en-US" smtClean="0"/>
-              <a:t>2026/7/6</a:t>
+              <a:t>2026/7/8</a:t>
             </a:fld>
             <a:endParaRPr kumimoji="1" lang="ja-JP" altLang="en-US"/>
           </a:p>
@@ -3290,7 +3291,7 @@
           <a:p>
             <a:fld id="{A30DED64-1E1A-3640-B2F9-E500B79F14E6}" type="datetimeFigureOut">
               <a:rPr kumimoji="1" lang="ja-JP" altLang="en-US" smtClean="0"/>
-              <a:t>2026/7/6</a:t>
+              <a:t>2026/7/8</a:t>
             </a:fld>
             <a:endParaRPr kumimoji="1" lang="ja-JP" altLang="en-US"/>
           </a:p>
@@ -3801,6 +3802,104 @@
         <p:cNvPr id="1" name="">
           <a:extLst>
             <a:ext uri="{FF2B5EF4-FFF2-40B4-BE49-F238E27FC236}">
+              <a16:creationId xmlns:a16="http://schemas.microsoft.com/office/drawing/2014/main" id="{5FD9F949-91F1-D876-97C8-3E7D6F7BB72F}"/>
+            </a:ext>
+          </a:extLst>
+        </p:cNvPr>
+        <p:cNvGrpSpPr/>
+        <p:nvPr/>
+      </p:nvGrpSpPr>
+      <p:grpSpPr>
+        <a:xfrm>
+          <a:off x="0" y="0"/>
+          <a:ext cx="0" cy="0"/>
+          <a:chOff x="0" y="0"/>
+          <a:chExt cx="0" cy="0"/>
+        </a:xfrm>
+      </p:grpSpPr>
+      <p:sp>
+        <p:nvSpPr>
+          <p:cNvPr id="7" name="タイトル 1">
+            <a:extLst>
+              <a:ext uri="{FF2B5EF4-FFF2-40B4-BE49-F238E27FC236}">
+                <a16:creationId xmlns:a16="http://schemas.microsoft.com/office/drawing/2014/main" id="{4E4F6F58-7682-F07A-890B-DD3B7F10C454}"/>
+              </a:ext>
+            </a:extLst>
+          </p:cNvPr>
+          <p:cNvSpPr>
+            <a:spLocks noGrp="1"/>
+          </p:cNvSpPr>
+          <p:nvPr>
+            <p:ph type="title"/>
+          </p:nvPr>
+        </p:nvSpPr>
+        <p:spPr/>
+        <p:txBody>
+          <a:bodyPr>
+            <a:normAutofit/>
+          </a:bodyPr>
+          <a:lstStyle/>
+          <a:p>
+            <a:r>
+              <a:rPr kumimoji="1" lang="ja-JP" altLang="en-US" sz="4000" b="1">
+                <a:latin typeface="Meiryo UI" panose="020B0604030504040204" pitchFamily="34" charset="-128"/>
+                <a:ea typeface="Meiryo UI" panose="020B0604030504040204" pitchFamily="34" charset="-128"/>
+              </a:rPr>
+              <a:t>方法</a:t>
+            </a:r>
+            <a:endParaRPr kumimoji="1" lang="ja-JP" altLang="en-US" sz="3200" b="1">
+              <a:latin typeface="Meiryo UI" panose="020B0604030504040204" pitchFamily="34" charset="-128"/>
+              <a:ea typeface="Meiryo UI" panose="020B0604030504040204" pitchFamily="34" charset="-128"/>
+            </a:endParaRPr>
+          </a:p>
+        </p:txBody>
+      </p:sp>
+      <p:sp>
+        <p:nvSpPr>
+          <p:cNvPr id="2" name="コンテンツ プレースホルダー 1">
+            <a:extLst>
+              <a:ext uri="{FF2B5EF4-FFF2-40B4-BE49-F238E27FC236}">
+                <a16:creationId xmlns:a16="http://schemas.microsoft.com/office/drawing/2014/main" id="{CA8C8BDD-0BA0-31F5-4618-C7F9C2BE8EA0}"/>
+              </a:ext>
+            </a:extLst>
+          </p:cNvPr>
+          <p:cNvSpPr>
+            <a:spLocks noGrp="1"/>
+          </p:cNvSpPr>
+          <p:nvPr>
+            <p:ph idx="1"/>
+          </p:nvPr>
+        </p:nvSpPr>
+        <p:spPr/>
+        <p:txBody>
+          <a:bodyPr/>
+          <a:lstStyle/>
+          <a:p>
+            <a:endParaRPr lang="ja-JP" altLang="en-US"/>
+          </a:p>
+        </p:txBody>
+      </p:sp>
+    </p:spTree>
+    <p:extLst>
+      <p:ext uri="{BB962C8B-B14F-4D97-AF65-F5344CB8AC3E}">
+        <p14:creationId xmlns:p14="http://schemas.microsoft.com/office/powerpoint/2010/main" val="3315213112"/>
+      </p:ext>
+    </p:extLst>
+  </p:cSld>
+  <p:clrMapOvr>
+    <a:masterClrMapping/>
+  </p:clrMapOvr>
+</p:sld>
+</file>
+
+<file path=ppt/slides/slide11.xml><?xml version="1.0" encoding="utf-8"?>
+<p:sld xmlns:a="http://schemas.openxmlformats.org/drawingml/2006/main" xmlns:r="http://schemas.openxmlformats.org/officeDocument/2006/relationships" xmlns:p="http://schemas.openxmlformats.org/presentationml/2006/main">
+  <p:cSld>
+    <p:spTree>
+      <p:nvGrpSpPr>
+        <p:cNvPr id="1" name="">
+          <a:extLst>
+            <a:ext uri="{FF2B5EF4-FFF2-40B4-BE49-F238E27FC236}">
               <a16:creationId xmlns:a16="http://schemas.microsoft.com/office/drawing/2014/main" id="{F4F8E1F8-410D-18AF-1C37-24F329AF672F}"/>
             </a:ext>
           </a:extLst>
@@ -3891,7 +3990,7 @@
 </p:sld>
 </file>
 
-<file path=ppt/slides/slide11.xml><?xml version="1.0" encoding="utf-8"?>
+<file path=ppt/slides/slide12.xml><?xml version="1.0" encoding="utf-8"?>
 <p:sld xmlns:a="http://schemas.openxmlformats.org/drawingml/2006/main" xmlns:r="http://schemas.openxmlformats.org/officeDocument/2006/relationships" xmlns:p="http://schemas.openxmlformats.org/presentationml/2006/main">
   <p:cSld>
     <p:spTree>
@@ -4211,6 +4310,86 @@
   <p:cSld>
     <p:spTree>
       <p:nvGrpSpPr>
+        <p:cNvPr id="1" name=""/>
+        <p:cNvGrpSpPr/>
+        <p:nvPr/>
+      </p:nvGrpSpPr>
+      <p:grpSpPr>
+        <a:xfrm>
+          <a:off x="0" y="0"/>
+          <a:ext cx="0" cy="0"/>
+          <a:chOff x="0" y="0"/>
+          <a:chExt cx="0" cy="0"/>
+        </a:xfrm>
+      </p:grpSpPr>
+      <p:sp>
+        <p:nvSpPr>
+          <p:cNvPr id="2" name="タイトル 1">
+            <a:extLst>
+              <a:ext uri="{FF2B5EF4-FFF2-40B4-BE49-F238E27FC236}">
+                <a16:creationId xmlns:a16="http://schemas.microsoft.com/office/drawing/2014/main" id="{04F3313C-F19E-7768-336D-F1BA067F8026}"/>
+              </a:ext>
+            </a:extLst>
+          </p:cNvPr>
+          <p:cNvSpPr>
+            <a:spLocks noGrp="1"/>
+          </p:cNvSpPr>
+          <p:nvPr>
+            <p:ph type="title"/>
+          </p:nvPr>
+        </p:nvSpPr>
+        <p:spPr/>
+        <p:txBody>
+          <a:bodyPr/>
+          <a:lstStyle/>
+          <a:p>
+            <a:endParaRPr kumimoji="1" lang="ja-JP" altLang="en-US" dirty="0"/>
+          </a:p>
+        </p:txBody>
+      </p:sp>
+      <p:sp>
+        <p:nvSpPr>
+          <p:cNvPr id="3" name="コンテンツ プレースホルダー 2">
+            <a:extLst>
+              <a:ext uri="{FF2B5EF4-FFF2-40B4-BE49-F238E27FC236}">
+                <a16:creationId xmlns:a16="http://schemas.microsoft.com/office/drawing/2014/main" id="{D80F40F3-548C-F55B-7306-4D711BFBE4C6}"/>
+              </a:ext>
+            </a:extLst>
+          </p:cNvPr>
+          <p:cNvSpPr>
+            <a:spLocks noGrp="1"/>
+          </p:cNvSpPr>
+          <p:nvPr>
+            <p:ph idx="1"/>
+          </p:nvPr>
+        </p:nvSpPr>
+        <p:spPr/>
+        <p:txBody>
+          <a:bodyPr/>
+          <a:lstStyle/>
+          <a:p>
+            <a:endParaRPr kumimoji="1" lang="ja-JP" altLang="en-US"/>
+          </a:p>
+        </p:txBody>
+      </p:sp>
+    </p:spTree>
+    <p:extLst>
+      <p:ext uri="{BB962C8B-B14F-4D97-AF65-F5344CB8AC3E}">
+        <p14:creationId xmlns:p14="http://schemas.microsoft.com/office/powerpoint/2010/main" val="929480571"/>
+      </p:ext>
+    </p:extLst>
+  </p:cSld>
+  <p:clrMapOvr>
+    <a:masterClrMapping/>
+  </p:clrMapOvr>
+</p:sld>
+</file>
+
+<file path=ppt/slides/slide5.xml><?xml version="1.0" encoding="utf-8"?>
+<p:sld xmlns:a="http://schemas.openxmlformats.org/drawingml/2006/main" xmlns:r="http://schemas.openxmlformats.org/officeDocument/2006/relationships" xmlns:p="http://schemas.openxmlformats.org/presentationml/2006/main">
+  <p:cSld>
+    <p:spTree>
+      <p:nvGrpSpPr>
         <p:cNvPr id="1" name="">
           <a:extLst>
             <a:ext uri="{FF2B5EF4-FFF2-40B4-BE49-F238E27FC236}">
@@ -4310,7 +4489,7 @@
 </p:sld>
 </file>
 
-<file path=ppt/slides/slide5.xml><?xml version="1.0" encoding="utf-8"?>
+<file path=ppt/slides/slide6.xml><?xml version="1.0" encoding="utf-8"?>
 <p:sld xmlns:a="http://schemas.openxmlformats.org/drawingml/2006/main" xmlns:r="http://schemas.openxmlformats.org/officeDocument/2006/relationships" xmlns:p="http://schemas.openxmlformats.org/presentationml/2006/main">
   <p:cSld>
     <p:spTree>
@@ -4424,7 +4603,7 @@
 </p:sld>
 </file>
 
-<file path=ppt/slides/slide6.xml><?xml version="1.0" encoding="utf-8"?>
+<file path=ppt/slides/slide7.xml><?xml version="1.0" encoding="utf-8"?>
 <p:sld xmlns:a="http://schemas.openxmlformats.org/drawingml/2006/main" xmlns:r="http://schemas.openxmlformats.org/officeDocument/2006/relationships" xmlns:p="http://schemas.openxmlformats.org/presentationml/2006/main">
   <p:cSld>
     <p:spTree>
@@ -4518,7 +4697,7 @@
 </p:sld>
 </file>
 
-<file path=ppt/slides/slide7.xml><?xml version="1.0" encoding="utf-8"?>
+<file path=ppt/slides/slide8.xml><?xml version="1.0" encoding="utf-8"?>
 <p:sld xmlns:a="http://schemas.openxmlformats.org/drawingml/2006/main" xmlns:r="http://schemas.openxmlformats.org/officeDocument/2006/relationships" xmlns:p="http://schemas.openxmlformats.org/presentationml/2006/main">
   <p:cSld>
     <p:spTree>
@@ -4616,7 +4795,7 @@
 </p:sld>
 </file>
 
-<file path=ppt/slides/slide8.xml><?xml version="1.0" encoding="utf-8"?>
+<file path=ppt/slides/slide9.xml><?xml version="1.0" encoding="utf-8"?>
 <p:sld xmlns:a="http://schemas.openxmlformats.org/drawingml/2006/main" xmlns:r="http://schemas.openxmlformats.org/officeDocument/2006/relationships" xmlns:p="http://schemas.openxmlformats.org/presentationml/2006/main">
   <p:cSld>
     <p:spTree>
@@ -4719,104 +4898,6 @@
     <p:extLst>
       <p:ext uri="{BB962C8B-B14F-4D97-AF65-F5344CB8AC3E}">
         <p14:creationId xmlns:p14="http://schemas.microsoft.com/office/powerpoint/2010/main" val="1303016132"/>
-      </p:ext>
-    </p:extLst>
-  </p:cSld>
-  <p:clrMapOvr>
-    <a:masterClrMapping/>
-  </p:clrMapOvr>
-</p:sld>
-</file>
-
-<file path=ppt/slides/slide9.xml><?xml version="1.0" encoding="utf-8"?>
-<p:sld xmlns:a="http://schemas.openxmlformats.org/drawingml/2006/main" xmlns:r="http://schemas.openxmlformats.org/officeDocument/2006/relationships" xmlns:p="http://schemas.openxmlformats.org/presentationml/2006/main">
-  <p:cSld>
-    <p:spTree>
-      <p:nvGrpSpPr>
-        <p:cNvPr id="1" name="">
-          <a:extLst>
-            <a:ext uri="{FF2B5EF4-FFF2-40B4-BE49-F238E27FC236}">
-              <a16:creationId xmlns:a16="http://schemas.microsoft.com/office/drawing/2014/main" id="{5FD9F949-91F1-D876-97C8-3E7D6F7BB72F}"/>
-            </a:ext>
-          </a:extLst>
-        </p:cNvPr>
-        <p:cNvGrpSpPr/>
-        <p:nvPr/>
-      </p:nvGrpSpPr>
-      <p:grpSpPr>
-        <a:xfrm>
-          <a:off x="0" y="0"/>
-          <a:ext cx="0" cy="0"/>
-          <a:chOff x="0" y="0"/>
-          <a:chExt cx="0" cy="0"/>
-        </a:xfrm>
-      </p:grpSpPr>
-      <p:sp>
-        <p:nvSpPr>
-          <p:cNvPr id="7" name="タイトル 1">
-            <a:extLst>
-              <a:ext uri="{FF2B5EF4-FFF2-40B4-BE49-F238E27FC236}">
-                <a16:creationId xmlns:a16="http://schemas.microsoft.com/office/drawing/2014/main" id="{4E4F6F58-7682-F07A-890B-DD3B7F10C454}"/>
-              </a:ext>
-            </a:extLst>
-          </p:cNvPr>
-          <p:cNvSpPr>
-            <a:spLocks noGrp="1"/>
-          </p:cNvSpPr>
-          <p:nvPr>
-            <p:ph type="title"/>
-          </p:nvPr>
-        </p:nvSpPr>
-        <p:spPr/>
-        <p:txBody>
-          <a:bodyPr>
-            <a:normAutofit/>
-          </a:bodyPr>
-          <a:lstStyle/>
-          <a:p>
-            <a:r>
-              <a:rPr kumimoji="1" lang="ja-JP" altLang="en-US" sz="4000" b="1">
-                <a:latin typeface="Meiryo UI" panose="020B0604030504040204" pitchFamily="34" charset="-128"/>
-                <a:ea typeface="Meiryo UI" panose="020B0604030504040204" pitchFamily="34" charset="-128"/>
-              </a:rPr>
-              <a:t>方法</a:t>
-            </a:r>
-            <a:endParaRPr kumimoji="1" lang="ja-JP" altLang="en-US" sz="3200" b="1">
-              <a:latin typeface="Meiryo UI" panose="020B0604030504040204" pitchFamily="34" charset="-128"/>
-              <a:ea typeface="Meiryo UI" panose="020B0604030504040204" pitchFamily="34" charset="-128"/>
-            </a:endParaRPr>
-          </a:p>
-        </p:txBody>
-      </p:sp>
-      <p:sp>
-        <p:nvSpPr>
-          <p:cNvPr id="2" name="コンテンツ プレースホルダー 1">
-            <a:extLst>
-              <a:ext uri="{FF2B5EF4-FFF2-40B4-BE49-F238E27FC236}">
-                <a16:creationId xmlns:a16="http://schemas.microsoft.com/office/drawing/2014/main" id="{CA8C8BDD-0BA0-31F5-4618-C7F9C2BE8EA0}"/>
-              </a:ext>
-            </a:extLst>
-          </p:cNvPr>
-          <p:cNvSpPr>
-            <a:spLocks noGrp="1"/>
-          </p:cNvSpPr>
-          <p:nvPr>
-            <p:ph idx="1"/>
-          </p:nvPr>
-        </p:nvSpPr>
-        <p:spPr/>
-        <p:txBody>
-          <a:bodyPr/>
-          <a:lstStyle/>
-          <a:p>
-            <a:endParaRPr lang="ja-JP" altLang="en-US"/>
-          </a:p>
-        </p:txBody>
-      </p:sp>
-    </p:spTree>
-    <p:extLst>
-      <p:ext uri="{BB962C8B-B14F-4D97-AF65-F5344CB8AC3E}">
-        <p14:creationId xmlns:p14="http://schemas.microsoft.com/office/powerpoint/2010/main" val="3315213112"/>
       </p:ext>
     </p:extLst>
   </p:cSld>
